--- a/结果记录.pptx
+++ b/结果记录.pptx
@@ -5,15 +5,17 @@
     <p:sldMasterId id="2147483648" r:id="rId1"/>
   </p:sldMasterIdLst>
   <p:notesMasterIdLst>
-    <p:notesMasterId r:id="rId8"/>
+    <p:notesMasterId r:id="rId10"/>
   </p:notesMasterIdLst>
   <p:sldIdLst>
     <p:sldId id="259" r:id="rId2"/>
     <p:sldId id="260" r:id="rId3"/>
     <p:sldId id="261" r:id="rId4"/>
-    <p:sldId id="256" r:id="rId5"/>
-    <p:sldId id="257" r:id="rId6"/>
-    <p:sldId id="258" r:id="rId7"/>
+    <p:sldId id="262" r:id="rId5"/>
+    <p:sldId id="263" r:id="rId6"/>
+    <p:sldId id="256" r:id="rId7"/>
+    <p:sldId id="257" r:id="rId8"/>
+    <p:sldId id="258" r:id="rId9"/>
   </p:sldIdLst>
   <p:sldSz cx="12192000" cy="6858000"/>
   <p:notesSz cx="6858000" cy="9144000"/>
@@ -543,6 +545,118 @@
     <p:extLst>
       <p:ext uri="{BB962C8B-B14F-4D97-AF65-F5344CB8AC3E}">
         <p14:creationId xmlns:p14="http://schemas.microsoft.com/office/powerpoint/2010/main" val="3540630817"/>
+      </p:ext>
+    </p:extLst>
+  </p:cSld>
+  <p:clrMapOvr>
+    <a:masterClrMapping/>
+  </p:clrMapOvr>
+</p:notes>
+</file>
+
+<file path=ppt/notesSlides/notesSlide2.xml><?xml version="1.0" encoding="utf-8"?>
+<p:notes xmlns:a="http://schemas.openxmlformats.org/drawingml/2006/main" xmlns:r="http://schemas.openxmlformats.org/officeDocument/2006/relationships" xmlns:p="http://schemas.openxmlformats.org/presentationml/2006/main">
+  <p:cSld>
+    <p:spTree>
+      <p:nvGrpSpPr>
+        <p:cNvPr id="1" name="">
+          <a:extLst>
+            <a:ext uri="{FF2B5EF4-FFF2-40B4-BE49-F238E27FC236}">
+              <a16:creationId xmlns:a16="http://schemas.microsoft.com/office/drawing/2014/main" id="{6E5EDC19-265D-8EA2-4C55-09CB369FEBC7}"/>
+            </a:ext>
+          </a:extLst>
+        </p:cNvPr>
+        <p:cNvGrpSpPr/>
+        <p:nvPr/>
+      </p:nvGrpSpPr>
+      <p:grpSpPr>
+        <a:xfrm>
+          <a:off x="0" y="0"/>
+          <a:ext cx="0" cy="0"/>
+          <a:chOff x="0" y="0"/>
+          <a:chExt cx="0" cy="0"/>
+        </a:xfrm>
+      </p:grpSpPr>
+      <p:sp>
+        <p:nvSpPr>
+          <p:cNvPr id="2" name="幻灯片图像占位符 1">
+            <a:extLst>
+              <a:ext uri="{FF2B5EF4-FFF2-40B4-BE49-F238E27FC236}">
+                <a16:creationId xmlns:a16="http://schemas.microsoft.com/office/drawing/2014/main" id="{0109514C-2DF8-BE17-F0B4-74DDC46FF7B0}"/>
+              </a:ext>
+            </a:extLst>
+          </p:cNvPr>
+          <p:cNvSpPr>
+            <a:spLocks noGrp="1" noRot="1" noChangeAspect="1"/>
+          </p:cNvSpPr>
+          <p:nvPr>
+            <p:ph type="sldImg"/>
+          </p:nvPr>
+        </p:nvSpPr>
+        <p:spPr/>
+      </p:sp>
+      <p:sp>
+        <p:nvSpPr>
+          <p:cNvPr id="3" name="备注占位符 2">
+            <a:extLst>
+              <a:ext uri="{FF2B5EF4-FFF2-40B4-BE49-F238E27FC236}">
+                <a16:creationId xmlns:a16="http://schemas.microsoft.com/office/drawing/2014/main" id="{105C0DD3-5DFA-E4AE-AADE-1DBFD5B9BE1A}"/>
+              </a:ext>
+            </a:extLst>
+          </p:cNvPr>
+          <p:cNvSpPr>
+            <a:spLocks noGrp="1"/>
+          </p:cNvSpPr>
+          <p:nvPr>
+            <p:ph type="body" idx="1"/>
+          </p:nvPr>
+        </p:nvSpPr>
+        <p:spPr/>
+        <p:txBody>
+          <a:bodyPr/>
+          <a:lstStyle/>
+          <a:p>
+            <a:r>
+              <a:rPr lang="en-US" altLang="zh-CN" dirty="0"/>
+              <a:t>curvature-gossip\scripts\plot_multi_vaoi_vs_transmissions.py</a:t>
+            </a:r>
+            <a:endParaRPr lang="zh-CN" altLang="en-US" dirty="0"/>
+          </a:p>
+        </p:txBody>
+      </p:sp>
+      <p:sp>
+        <p:nvSpPr>
+          <p:cNvPr id="4" name="灯片编号占位符 3">
+            <a:extLst>
+              <a:ext uri="{FF2B5EF4-FFF2-40B4-BE49-F238E27FC236}">
+                <a16:creationId xmlns:a16="http://schemas.microsoft.com/office/drawing/2014/main" id="{67942B5F-0C36-D719-981A-5BC81C97036A}"/>
+              </a:ext>
+            </a:extLst>
+          </p:cNvPr>
+          <p:cNvSpPr>
+            <a:spLocks noGrp="1"/>
+          </p:cNvSpPr>
+          <p:nvPr>
+            <p:ph type="sldNum" sz="quarter" idx="5"/>
+          </p:nvPr>
+        </p:nvSpPr>
+        <p:spPr/>
+        <p:txBody>
+          <a:bodyPr/>
+          <a:lstStyle/>
+          <a:p>
+            <a:fld id="{E249CDDF-5849-475B-8FE8-CAF368895B88}" type="slidenum">
+              <a:rPr lang="zh-CN" altLang="en-US" smtClean="0"/>
+              <a:t>4</a:t>
+            </a:fld>
+            <a:endParaRPr lang="zh-CN" altLang="en-US"/>
+          </a:p>
+        </p:txBody>
+      </p:sp>
+    </p:spTree>
+    <p:extLst>
+      <p:ext uri="{BB962C8B-B14F-4D97-AF65-F5344CB8AC3E}">
+        <p14:creationId xmlns:p14="http://schemas.microsoft.com/office/powerpoint/2010/main" val="137276696"/>
       </p:ext>
     </p:extLst>
   </p:cSld>
@@ -6865,7 +6979,7 @@
         </p:blipFill>
         <p:spPr>
           <a:xfrm>
-            <a:off x="87473" y="0"/>
+            <a:off x="0" y="0"/>
             <a:ext cx="9441493" cy="6858000"/>
           </a:xfrm>
           <a:prstGeom prst="rect">
@@ -7046,7 +7160,7 @@
         </p:blipFill>
         <p:spPr>
           <a:xfrm>
-            <a:off x="57515" y="0"/>
+            <a:off x="4176" y="0"/>
             <a:ext cx="9516649" cy="6858000"/>
           </a:xfrm>
           <a:prstGeom prst="rect">
@@ -7104,7 +7218,7 @@
               <a:t>P_u</a:t>
             </a:r>
             <a:r>
-              <a:rPr lang="en-US" altLang="zh-CN" b="1">
+              <a:rPr lang="en-US" altLang="zh-CN" b="1" dirty="0">
                 <a:latin typeface="微软雅黑" panose="020B0503020204020204" pitchFamily="34" charset="-122"/>
                 <a:ea typeface="微软雅黑" panose="020B0503020204020204" pitchFamily="34" charset="-122"/>
               </a:rPr>
@@ -7131,6 +7245,595 @@
 </file>
 
 <file path=ppt/slides/slide4.xml><?xml version="1.0" encoding="utf-8"?>
+<p:sld xmlns:a="http://schemas.openxmlformats.org/drawingml/2006/main" xmlns:r="http://schemas.openxmlformats.org/officeDocument/2006/relationships" xmlns:p="http://schemas.openxmlformats.org/presentationml/2006/main">
+  <p:cSld>
+    <p:spTree>
+      <p:nvGrpSpPr>
+        <p:cNvPr id="1" name="">
+          <a:extLst>
+            <a:ext uri="{FF2B5EF4-FFF2-40B4-BE49-F238E27FC236}">
+              <a16:creationId xmlns:a16="http://schemas.microsoft.com/office/drawing/2014/main" id="{37AA5931-B8B1-A508-E8E5-9CF11B57FC9A}"/>
+            </a:ext>
+          </a:extLst>
+        </p:cNvPr>
+        <p:cNvGrpSpPr/>
+        <p:nvPr/>
+      </p:nvGrpSpPr>
+      <p:grpSpPr>
+        <a:xfrm>
+          <a:off x="0" y="0"/>
+          <a:ext cx="0" cy="0"/>
+          <a:chOff x="0" y="0"/>
+          <a:chExt cx="0" cy="0"/>
+        </a:xfrm>
+      </p:grpSpPr>
+      <p:pic>
+        <p:nvPicPr>
+          <p:cNvPr id="8" name="图片 7">
+            <a:extLst>
+              <a:ext uri="{FF2B5EF4-FFF2-40B4-BE49-F238E27FC236}">
+                <a16:creationId xmlns:a16="http://schemas.microsoft.com/office/drawing/2014/main" id="{E92D6405-1FC9-1DDB-7803-277A4AEC5C01}"/>
+              </a:ext>
+            </a:extLst>
+          </p:cNvPr>
+          <p:cNvPicPr>
+            <a:picLocks noChangeAspect="1"/>
+          </p:cNvPicPr>
+          <p:nvPr/>
+        </p:nvPicPr>
+        <p:blipFill>
+          <a:blip r:embed="rId3"/>
+          <a:srcRect b="38111"/>
+          <a:stretch>
+            <a:fillRect/>
+          </a:stretch>
+        </p:blipFill>
+        <p:spPr>
+          <a:xfrm>
+            <a:off x="1" y="51453"/>
+            <a:ext cx="7513320" cy="3377547"/>
+          </a:xfrm>
+          <a:prstGeom prst="rect">
+            <a:avLst/>
+          </a:prstGeom>
+        </p:spPr>
+      </p:pic>
+      <p:pic>
+        <p:nvPicPr>
+          <p:cNvPr id="5" name="图片 4">
+            <a:extLst>
+              <a:ext uri="{FF2B5EF4-FFF2-40B4-BE49-F238E27FC236}">
+                <a16:creationId xmlns:a16="http://schemas.microsoft.com/office/drawing/2014/main" id="{109DBA0E-033E-14B4-D8BD-7832DD040693}"/>
+              </a:ext>
+            </a:extLst>
+          </p:cNvPr>
+          <p:cNvPicPr>
+            <a:picLocks noChangeAspect="1"/>
+          </p:cNvPicPr>
+          <p:nvPr/>
+        </p:nvPicPr>
+        <p:blipFill>
+          <a:blip r:embed="rId4"/>
+          <a:srcRect b="41000"/>
+          <a:stretch>
+            <a:fillRect/>
+          </a:stretch>
+        </p:blipFill>
+        <p:spPr>
+          <a:xfrm>
+            <a:off x="1" y="3517010"/>
+            <a:ext cx="7513320" cy="3219888"/>
+          </a:xfrm>
+          <a:prstGeom prst="rect">
+            <a:avLst/>
+          </a:prstGeom>
+        </p:spPr>
+      </p:pic>
+      <p:sp>
+        <p:nvSpPr>
+          <p:cNvPr id="9" name="文本框 8">
+            <a:extLst>
+              <a:ext uri="{FF2B5EF4-FFF2-40B4-BE49-F238E27FC236}">
+                <a16:creationId xmlns:a16="http://schemas.microsoft.com/office/drawing/2014/main" id="{D4DA6D8E-601C-0E82-9DAB-3CA6EFEEB4B0}"/>
+              </a:ext>
+            </a:extLst>
+          </p:cNvPr>
+          <p:cNvSpPr txBox="1"/>
+          <p:nvPr/>
+        </p:nvSpPr>
+        <p:spPr>
+          <a:xfrm>
+            <a:off x="8313733" y="642618"/>
+            <a:ext cx="2750507" cy="1754326"/>
+          </a:xfrm>
+          <a:prstGeom prst="rect">
+            <a:avLst/>
+          </a:prstGeom>
+          <a:noFill/>
+        </p:spPr>
+        <p:txBody>
+          <a:bodyPr wrap="square">
+            <a:spAutoFit/>
+          </a:bodyPr>
+          <a:lstStyle/>
+          <a:p>
+            <a:r>
+              <a:rPr lang="zh-CN" altLang="en-US" b="1" dirty="0">
+                <a:latin typeface="微软雅黑" panose="020B0503020204020204" pitchFamily="34" charset="-122"/>
+                <a:ea typeface="微软雅黑" panose="020B0503020204020204" pitchFamily="34" charset="-122"/>
+              </a:rPr>
+              <a:t>不用精确的全局曲率计算</a:t>
+            </a:r>
+            <a:endParaRPr lang="en-US" altLang="zh-CN" b="1" dirty="0">
+              <a:latin typeface="微软雅黑" panose="020B0503020204020204" pitchFamily="34" charset="-122"/>
+              <a:ea typeface="微软雅黑" panose="020B0503020204020204" pitchFamily="34" charset="-122"/>
+            </a:endParaRPr>
+          </a:p>
+          <a:p>
+            <a:endParaRPr lang="en-US" altLang="zh-CN" b="1" dirty="0">
+              <a:latin typeface="微软雅黑" panose="020B0503020204020204" pitchFamily="34" charset="-122"/>
+              <a:ea typeface="微软雅黑" panose="020B0503020204020204" pitchFamily="34" charset="-122"/>
+            </a:endParaRPr>
+          </a:p>
+          <a:p>
+            <a:r>
+              <a:rPr lang="zh-CN" altLang="en-US" b="1" dirty="0">
+                <a:latin typeface="微软雅黑" panose="020B0503020204020204" pitchFamily="34" charset="-122"/>
+                <a:ea typeface="微软雅黑" panose="020B0503020204020204" pitchFamily="34" charset="-122"/>
+              </a:rPr>
+              <a:t>用分布式只需</a:t>
+            </a:r>
+            <a:r>
+              <a:rPr lang="en-US" altLang="zh-CN" b="1" dirty="0">
+                <a:latin typeface="微软雅黑" panose="020B0503020204020204" pitchFamily="34" charset="-122"/>
+                <a:ea typeface="微软雅黑" panose="020B0503020204020204" pitchFamily="34" charset="-122"/>
+              </a:rPr>
+              <a:t>1</a:t>
+            </a:r>
+            <a:r>
+              <a:rPr lang="zh-CN" altLang="en-US" b="1" dirty="0">
+                <a:latin typeface="微软雅黑" panose="020B0503020204020204" pitchFamily="34" charset="-122"/>
+                <a:ea typeface="微软雅黑" panose="020B0503020204020204" pitchFamily="34" charset="-122"/>
+              </a:rPr>
+              <a:t>跳邻居信息的曲率估计</a:t>
+            </a:r>
+            <a:endParaRPr lang="en-US" altLang="zh-CN" b="1" dirty="0">
+              <a:latin typeface="微软雅黑" panose="020B0503020204020204" pitchFamily="34" charset="-122"/>
+              <a:ea typeface="微软雅黑" panose="020B0503020204020204" pitchFamily="34" charset="-122"/>
+            </a:endParaRPr>
+          </a:p>
+          <a:p>
+            <a:endParaRPr lang="en-US" altLang="zh-CN" b="1" dirty="0">
+              <a:latin typeface="微软雅黑" panose="020B0503020204020204" pitchFamily="34" charset="-122"/>
+              <a:ea typeface="微软雅黑" panose="020B0503020204020204" pitchFamily="34" charset="-122"/>
+            </a:endParaRPr>
+          </a:p>
+          <a:p>
+            <a:r>
+              <a:rPr lang="zh-CN" altLang="en-US" b="1" dirty="0">
+                <a:latin typeface="微软雅黑" panose="020B0503020204020204" pitchFamily="34" charset="-122"/>
+                <a:ea typeface="微软雅黑" panose="020B0503020204020204" pitchFamily="34" charset="-122"/>
+              </a:rPr>
+              <a:t>相同配置下性能差了一些</a:t>
+            </a:r>
+            <a:endParaRPr lang="en-US" altLang="zh-CN" b="1" dirty="0">
+              <a:latin typeface="微软雅黑" panose="020B0503020204020204" pitchFamily="34" charset="-122"/>
+              <a:ea typeface="微软雅黑" panose="020B0503020204020204" pitchFamily="34" charset="-122"/>
+            </a:endParaRPr>
+          </a:p>
+        </p:txBody>
+      </p:sp>
+      <p:sp>
+        <p:nvSpPr>
+          <p:cNvPr id="10" name="文本框 9">
+            <a:extLst>
+              <a:ext uri="{FF2B5EF4-FFF2-40B4-BE49-F238E27FC236}">
+                <a16:creationId xmlns:a16="http://schemas.microsoft.com/office/drawing/2014/main" id="{AE6C4C19-0CFD-46E9-EF01-4332CECD268C}"/>
+              </a:ext>
+            </a:extLst>
+          </p:cNvPr>
+          <p:cNvSpPr txBox="1"/>
+          <p:nvPr/>
+        </p:nvSpPr>
+        <p:spPr>
+          <a:xfrm>
+            <a:off x="2674620" y="4003038"/>
+            <a:ext cx="3558541" cy="369332"/>
+          </a:xfrm>
+          <a:prstGeom prst="rect">
+            <a:avLst/>
+          </a:prstGeom>
+          <a:noFill/>
+        </p:spPr>
+        <p:txBody>
+          <a:bodyPr wrap="square">
+            <a:spAutoFit/>
+          </a:bodyPr>
+          <a:lstStyle/>
+          <a:p>
+            <a:r>
+              <a:rPr lang="en-US" altLang="zh-CN" b="1" dirty="0">
+                <a:latin typeface="微软雅黑" panose="020B0503020204020204" pitchFamily="34" charset="-122"/>
+                <a:ea typeface="微软雅黑" panose="020B0503020204020204" pitchFamily="34" charset="-122"/>
+              </a:rPr>
+              <a:t>N=100</a:t>
+            </a:r>
+            <a:r>
+              <a:rPr lang="zh-CN" altLang="en-US" b="1" dirty="0">
+                <a:latin typeface="微软雅黑" panose="020B0503020204020204" pitchFamily="34" charset="-122"/>
+                <a:ea typeface="微软雅黑" panose="020B0503020204020204" pitchFamily="34" charset="-122"/>
+              </a:rPr>
+              <a:t>；</a:t>
+            </a:r>
+            <a:r>
+              <a:rPr lang="en-US" altLang="zh-CN" b="1" dirty="0" err="1">
+                <a:latin typeface="微软雅黑" panose="020B0503020204020204" pitchFamily="34" charset="-122"/>
+                <a:ea typeface="微软雅黑" panose="020B0503020204020204" pitchFamily="34" charset="-122"/>
+              </a:rPr>
+              <a:t>P_u</a:t>
+            </a:r>
+            <a:r>
+              <a:rPr lang="en-US" altLang="zh-CN" b="1" dirty="0">
+                <a:latin typeface="微软雅黑" panose="020B0503020204020204" pitchFamily="34" charset="-122"/>
+                <a:ea typeface="微软雅黑" panose="020B0503020204020204" pitchFamily="34" charset="-122"/>
+              </a:rPr>
+              <a:t>=0.05</a:t>
+            </a:r>
+            <a:r>
+              <a:rPr lang="zh-CN" altLang="en-US" b="1" dirty="0">
+                <a:latin typeface="微软雅黑" panose="020B0503020204020204" pitchFamily="34" charset="-122"/>
+                <a:ea typeface="微软雅黑" panose="020B0503020204020204" pitchFamily="34" charset="-122"/>
+              </a:rPr>
+              <a:t>；估计曲率</a:t>
+            </a:r>
+          </a:p>
+        </p:txBody>
+      </p:sp>
+    </p:spTree>
+    <p:extLst>
+      <p:ext uri="{BB962C8B-B14F-4D97-AF65-F5344CB8AC3E}">
+        <p14:creationId xmlns:p14="http://schemas.microsoft.com/office/powerpoint/2010/main" val="1905174673"/>
+      </p:ext>
+    </p:extLst>
+  </p:cSld>
+  <p:clrMapOvr>
+    <a:masterClrMapping/>
+  </p:clrMapOvr>
+</p:sld>
+</file>
+
+<file path=ppt/slides/slide5.xml><?xml version="1.0" encoding="utf-8"?>
+<p:sld xmlns:a="http://schemas.openxmlformats.org/drawingml/2006/main" xmlns:r="http://schemas.openxmlformats.org/officeDocument/2006/relationships" xmlns:p="http://schemas.openxmlformats.org/presentationml/2006/main">
+  <p:cSld>
+    <p:spTree>
+      <p:nvGrpSpPr>
+        <p:cNvPr id="1" name="">
+          <a:extLst>
+            <a:ext uri="{FF2B5EF4-FFF2-40B4-BE49-F238E27FC236}">
+              <a16:creationId xmlns:a16="http://schemas.microsoft.com/office/drawing/2014/main" id="{41ACC6AF-253F-E3D3-36A4-C461440C7B1B}"/>
+            </a:ext>
+          </a:extLst>
+        </p:cNvPr>
+        <p:cNvGrpSpPr/>
+        <p:nvPr/>
+      </p:nvGrpSpPr>
+      <p:grpSpPr>
+        <a:xfrm>
+          <a:off x="0" y="0"/>
+          <a:ext cx="0" cy="0"/>
+          <a:chOff x="0" y="0"/>
+          <a:chExt cx="0" cy="0"/>
+        </a:xfrm>
+      </p:grpSpPr>
+      <p:pic>
+        <p:nvPicPr>
+          <p:cNvPr id="5" name="图片 4">
+            <a:extLst>
+              <a:ext uri="{FF2B5EF4-FFF2-40B4-BE49-F238E27FC236}">
+                <a16:creationId xmlns:a16="http://schemas.microsoft.com/office/drawing/2014/main" id="{BAFB5F39-3BE2-D0BB-8F58-143813C82736}"/>
+              </a:ext>
+            </a:extLst>
+          </p:cNvPr>
+          <p:cNvPicPr>
+            <a:picLocks noChangeAspect="1"/>
+          </p:cNvPicPr>
+          <p:nvPr/>
+        </p:nvPicPr>
+        <p:blipFill>
+          <a:blip r:embed="rId2"/>
+          <a:srcRect b="41111"/>
+          <a:stretch>
+            <a:fillRect/>
+          </a:stretch>
+        </p:blipFill>
+        <p:spPr>
+          <a:xfrm>
+            <a:off x="4177" y="0"/>
+            <a:ext cx="7239000" cy="3072029"/>
+          </a:xfrm>
+          <a:prstGeom prst="rect">
+            <a:avLst/>
+          </a:prstGeom>
+        </p:spPr>
+      </p:pic>
+      <p:sp>
+        <p:nvSpPr>
+          <p:cNvPr id="7" name="文本框 6">
+            <a:extLst>
+              <a:ext uri="{FF2B5EF4-FFF2-40B4-BE49-F238E27FC236}">
+                <a16:creationId xmlns:a16="http://schemas.microsoft.com/office/drawing/2014/main" id="{0AE3AEC8-9C09-83AE-CEC4-BC742151173F}"/>
+              </a:ext>
+            </a:extLst>
+          </p:cNvPr>
+          <p:cNvSpPr txBox="1"/>
+          <p:nvPr/>
+        </p:nvSpPr>
+        <p:spPr>
+          <a:xfrm>
+            <a:off x="3291841" y="360678"/>
+            <a:ext cx="2583180" cy="369332"/>
+          </a:xfrm>
+          <a:prstGeom prst="rect">
+            <a:avLst/>
+          </a:prstGeom>
+          <a:noFill/>
+        </p:spPr>
+        <p:txBody>
+          <a:bodyPr wrap="square">
+            <a:spAutoFit/>
+          </a:bodyPr>
+          <a:lstStyle/>
+          <a:p>
+            <a:r>
+              <a:rPr lang="en-US" altLang="zh-CN" b="1" dirty="0">
+                <a:latin typeface="微软雅黑" panose="020B0503020204020204" pitchFamily="34" charset="-122"/>
+                <a:ea typeface="微软雅黑" panose="020B0503020204020204" pitchFamily="34" charset="-122"/>
+              </a:rPr>
+              <a:t>N=100</a:t>
+            </a:r>
+            <a:r>
+              <a:rPr lang="zh-CN" altLang="en-US" b="1" dirty="0">
+                <a:latin typeface="微软雅黑" panose="020B0503020204020204" pitchFamily="34" charset="-122"/>
+                <a:ea typeface="微软雅黑" panose="020B0503020204020204" pitchFamily="34" charset="-122"/>
+              </a:rPr>
+              <a:t>；</a:t>
+            </a:r>
+            <a:r>
+              <a:rPr lang="en-US" altLang="zh-CN" b="1" dirty="0" err="1">
+                <a:latin typeface="微软雅黑" panose="020B0503020204020204" pitchFamily="34" charset="-122"/>
+                <a:ea typeface="微软雅黑" panose="020B0503020204020204" pitchFamily="34" charset="-122"/>
+              </a:rPr>
+              <a:t>P_u</a:t>
+            </a:r>
+            <a:r>
+              <a:rPr lang="en-US" altLang="zh-CN" b="1" dirty="0">
+                <a:latin typeface="微软雅黑" panose="020B0503020204020204" pitchFamily="34" charset="-122"/>
+                <a:ea typeface="微软雅黑" panose="020B0503020204020204" pitchFamily="34" charset="-122"/>
+              </a:rPr>
+              <a:t>=0.20</a:t>
+            </a:r>
+            <a:endParaRPr lang="zh-CN" altLang="en-US" b="1" dirty="0">
+              <a:latin typeface="微软雅黑" panose="020B0503020204020204" pitchFamily="34" charset="-122"/>
+              <a:ea typeface="微软雅黑" panose="020B0503020204020204" pitchFamily="34" charset="-122"/>
+            </a:endParaRPr>
+          </a:p>
+        </p:txBody>
+      </p:sp>
+      <p:pic>
+        <p:nvPicPr>
+          <p:cNvPr id="3" name="图片 2">
+            <a:extLst>
+              <a:ext uri="{FF2B5EF4-FFF2-40B4-BE49-F238E27FC236}">
+                <a16:creationId xmlns:a16="http://schemas.microsoft.com/office/drawing/2014/main" id="{E74C768D-8DFC-2589-60F1-B99D52140D6F}"/>
+              </a:ext>
+            </a:extLst>
+          </p:cNvPr>
+          <p:cNvPicPr>
+            <a:picLocks noChangeAspect="1"/>
+          </p:cNvPicPr>
+          <p:nvPr/>
+        </p:nvPicPr>
+        <p:blipFill>
+          <a:blip r:embed="rId3"/>
+          <a:srcRect b="41111"/>
+          <a:stretch>
+            <a:fillRect/>
+          </a:stretch>
+        </p:blipFill>
+        <p:spPr>
+          <a:xfrm>
+            <a:off x="1" y="3425293"/>
+            <a:ext cx="7239000" cy="3072029"/>
+          </a:xfrm>
+          <a:prstGeom prst="rect">
+            <a:avLst/>
+          </a:prstGeom>
+        </p:spPr>
+      </p:pic>
+      <p:sp>
+        <p:nvSpPr>
+          <p:cNvPr id="4" name="文本框 3">
+            <a:extLst>
+              <a:ext uri="{FF2B5EF4-FFF2-40B4-BE49-F238E27FC236}">
+                <a16:creationId xmlns:a16="http://schemas.microsoft.com/office/drawing/2014/main" id="{B2ED22A6-42ED-2104-613A-006042AEB78B}"/>
+              </a:ext>
+            </a:extLst>
+          </p:cNvPr>
+          <p:cNvSpPr txBox="1"/>
+          <p:nvPr/>
+        </p:nvSpPr>
+        <p:spPr>
+          <a:xfrm>
+            <a:off x="3291840" y="3873706"/>
+            <a:ext cx="3619500" cy="369332"/>
+          </a:xfrm>
+          <a:prstGeom prst="rect">
+            <a:avLst/>
+          </a:prstGeom>
+          <a:noFill/>
+        </p:spPr>
+        <p:txBody>
+          <a:bodyPr wrap="square">
+            <a:spAutoFit/>
+          </a:bodyPr>
+          <a:lstStyle/>
+          <a:p>
+            <a:r>
+              <a:rPr lang="en-US" altLang="zh-CN" b="1" dirty="0">
+                <a:latin typeface="微软雅黑" panose="020B0503020204020204" pitchFamily="34" charset="-122"/>
+                <a:ea typeface="微软雅黑" panose="020B0503020204020204" pitchFamily="34" charset="-122"/>
+              </a:rPr>
+              <a:t>N=100</a:t>
+            </a:r>
+            <a:r>
+              <a:rPr lang="zh-CN" altLang="en-US" b="1" dirty="0">
+                <a:latin typeface="微软雅黑" panose="020B0503020204020204" pitchFamily="34" charset="-122"/>
+                <a:ea typeface="微软雅黑" panose="020B0503020204020204" pitchFamily="34" charset="-122"/>
+              </a:rPr>
+              <a:t>；</a:t>
+            </a:r>
+            <a:r>
+              <a:rPr lang="en-US" altLang="zh-CN" b="1" dirty="0" err="1">
+                <a:latin typeface="微软雅黑" panose="020B0503020204020204" pitchFamily="34" charset="-122"/>
+                <a:ea typeface="微软雅黑" panose="020B0503020204020204" pitchFamily="34" charset="-122"/>
+              </a:rPr>
+              <a:t>P_u</a:t>
+            </a:r>
+            <a:r>
+              <a:rPr lang="en-US" altLang="zh-CN" b="1" dirty="0">
+                <a:latin typeface="微软雅黑" panose="020B0503020204020204" pitchFamily="34" charset="-122"/>
+                <a:ea typeface="微软雅黑" panose="020B0503020204020204" pitchFamily="34" charset="-122"/>
+              </a:rPr>
+              <a:t>=0.20</a:t>
+            </a:r>
+            <a:r>
+              <a:rPr lang="zh-CN" altLang="en-US" b="1" dirty="0">
+                <a:latin typeface="微软雅黑" panose="020B0503020204020204" pitchFamily="34" charset="-122"/>
+                <a:ea typeface="微软雅黑" panose="020B0503020204020204" pitchFamily="34" charset="-122"/>
+              </a:rPr>
+              <a:t>；估计曲率</a:t>
+            </a:r>
+          </a:p>
+        </p:txBody>
+      </p:sp>
+      <p:sp>
+        <p:nvSpPr>
+          <p:cNvPr id="6" name="矩形 5">
+            <a:extLst>
+              <a:ext uri="{FF2B5EF4-FFF2-40B4-BE49-F238E27FC236}">
+                <a16:creationId xmlns:a16="http://schemas.microsoft.com/office/drawing/2014/main" id="{B3315FFB-666B-F2B2-8166-B6DBE2FD0417}"/>
+              </a:ext>
+            </a:extLst>
+          </p:cNvPr>
+          <p:cNvSpPr/>
+          <p:nvPr/>
+        </p:nvSpPr>
+        <p:spPr>
+          <a:xfrm>
+            <a:off x="160020" y="2164080"/>
+            <a:ext cx="3421380" cy="304800"/>
+          </a:xfrm>
+          <a:prstGeom prst="rect">
+            <a:avLst/>
+          </a:prstGeom>
+          <a:noFill/>
+          <a:ln>
+            <a:solidFill>
+              <a:srgbClr val="FF0000"/>
+            </a:solidFill>
+          </a:ln>
+        </p:spPr>
+        <p:style>
+          <a:lnRef idx="2">
+            <a:schemeClr val="accent1">
+              <a:shade val="15000"/>
+            </a:schemeClr>
+          </a:lnRef>
+          <a:fillRef idx="1">
+            <a:schemeClr val="accent1"/>
+          </a:fillRef>
+          <a:effectRef idx="0">
+            <a:schemeClr val="accent1"/>
+          </a:effectRef>
+          <a:fontRef idx="minor">
+            <a:schemeClr val="lt1"/>
+          </a:fontRef>
+        </p:style>
+        <p:txBody>
+          <a:bodyPr rtlCol="0" anchor="ctr"/>
+          <a:lstStyle/>
+          <a:p>
+            <a:pPr algn="ctr"/>
+            <a:endParaRPr lang="zh-CN" altLang="en-US"/>
+          </a:p>
+        </p:txBody>
+      </p:sp>
+      <p:sp>
+        <p:nvSpPr>
+          <p:cNvPr id="8" name="矩形 7">
+            <a:extLst>
+              <a:ext uri="{FF2B5EF4-FFF2-40B4-BE49-F238E27FC236}">
+                <a16:creationId xmlns:a16="http://schemas.microsoft.com/office/drawing/2014/main" id="{FD6A0EDD-184A-F046-CBAB-B858B7657069}"/>
+              </a:ext>
+            </a:extLst>
+          </p:cNvPr>
+          <p:cNvSpPr/>
+          <p:nvPr/>
+        </p:nvSpPr>
+        <p:spPr>
+          <a:xfrm>
+            <a:off x="160020" y="5783580"/>
+            <a:ext cx="3741420" cy="304800"/>
+          </a:xfrm>
+          <a:prstGeom prst="rect">
+            <a:avLst/>
+          </a:prstGeom>
+          <a:noFill/>
+          <a:ln>
+            <a:solidFill>
+              <a:srgbClr val="FF0000"/>
+            </a:solidFill>
+          </a:ln>
+        </p:spPr>
+        <p:style>
+          <a:lnRef idx="2">
+            <a:schemeClr val="accent1">
+              <a:shade val="15000"/>
+            </a:schemeClr>
+          </a:lnRef>
+          <a:fillRef idx="1">
+            <a:schemeClr val="accent1"/>
+          </a:fillRef>
+          <a:effectRef idx="0">
+            <a:schemeClr val="accent1"/>
+          </a:effectRef>
+          <a:fontRef idx="minor">
+            <a:schemeClr val="lt1"/>
+          </a:fontRef>
+        </p:style>
+        <p:txBody>
+          <a:bodyPr rtlCol="0" anchor="ctr"/>
+          <a:lstStyle/>
+          <a:p>
+            <a:pPr algn="ctr"/>
+            <a:endParaRPr lang="zh-CN" altLang="en-US"/>
+          </a:p>
+        </p:txBody>
+      </p:sp>
+    </p:spTree>
+    <p:extLst>
+      <p:ext uri="{BB962C8B-B14F-4D97-AF65-F5344CB8AC3E}">
+        <p14:creationId xmlns:p14="http://schemas.microsoft.com/office/powerpoint/2010/main" val="1243782208"/>
+      </p:ext>
+    </p:extLst>
+  </p:cSld>
+  <p:clrMapOvr>
+    <a:masterClrMapping/>
+  </p:clrMapOvr>
+</p:sld>
+</file>
+
+<file path=ppt/slides/slide6.xml><?xml version="1.0" encoding="utf-8"?>
 <p:sld xmlns:a="http://schemas.openxmlformats.org/drawingml/2006/main" xmlns:r="http://schemas.openxmlformats.org/officeDocument/2006/relationships" xmlns:p="http://schemas.openxmlformats.org/presentationml/2006/main">
   <p:cSld>
     <p:spTree>
@@ -8770,7 +9473,7 @@
 </p:sld>
 </file>
 
-<file path=ppt/slides/slide5.xml><?xml version="1.0" encoding="utf-8"?>
+<file path=ppt/slides/slide7.xml><?xml version="1.0" encoding="utf-8"?>
 <p:sld xmlns:a="http://schemas.openxmlformats.org/drawingml/2006/main" xmlns:r="http://schemas.openxmlformats.org/officeDocument/2006/relationships" xmlns:p="http://schemas.openxmlformats.org/presentationml/2006/main">
   <p:cSld>
     <p:spTree>
@@ -10399,7 +11102,7 @@
 </p:sld>
 </file>
 
-<file path=ppt/slides/slide6.xml><?xml version="1.0" encoding="utf-8"?>
+<file path=ppt/slides/slide8.xml><?xml version="1.0" encoding="utf-8"?>
 <p:sld xmlns:a="http://schemas.openxmlformats.org/drawingml/2006/main" xmlns:r="http://schemas.openxmlformats.org/officeDocument/2006/relationships" xmlns:p="http://schemas.openxmlformats.org/presentationml/2006/main">
   <p:cSld>
     <p:spTree>

--- a/结果记录.pptx
+++ b/结果记录.pptx
@@ -1183,364 +1183,25 @@
         </p:nvSpPr>
         <p:spPr/>
       </p:sp>
-      <mc:AlternateContent xmlns:mc="http://schemas.openxmlformats.org/markup-compatibility/2006">
-        <mc:Choice xmlns:a14="http://schemas.microsoft.com/office/drawing/2010/main" Requires="a14">
-          <p:sp>
-            <p:nvSpPr>
-              <p:cNvPr id="3" name="备注占位符 2"/>
-              <p:cNvSpPr>
-                <a:spLocks noGrp="1"/>
-              </p:cNvSpPr>
-              <p:nvPr>
-                <p:ph type="body" idx="1"/>
-              </p:nvPr>
-            </p:nvSpPr>
-            <p:spPr/>
-            <p:txBody>
-              <a:bodyPr/>
-              <a:lstStyle/>
-              <a:p>
-                <a:r>
-                  <a:rPr lang="zh-CN" altLang="zh-CN" dirty="0"/>
-                  <a:t>每个目标细胞数单独建立候选集合</a:t>
-                </a:r>
-                <a:endParaRPr lang="en-US" altLang="zh-CN" dirty="0"/>
-              </a:p>
-              <a:p>
-                <a:endParaRPr lang="en-US" altLang="zh-CN" dirty="0"/>
-              </a:p>
-              <a:p>
-                <a:r>
-                  <a:rPr lang="zh-CN" altLang="zh-CN" dirty="0"/>
-                  <a:t>基本记录单位为：</a:t>
-                </a:r>
-                <a14:m>
-                  <m:oMath xmlns:m="http://schemas.openxmlformats.org/officeDocument/2006/math">
-                    <m:d>
-                      <m:dPr>
-                        <m:sepChr m:val=","/>
-                        <m:ctrlPr>
-                          <a:rPr lang="zh-CN" altLang="en-US" sz="1200" b="0" kern="1200">
-                            <a:solidFill>
-                              <a:schemeClr val="tx1"/>
-                            </a:solidFill>
-                            <a:latin typeface="+mn-lt"/>
-                            <a:ea typeface="+mn-ea"/>
-                            <a:cs typeface="+mn-cs"/>
-                          </a:rPr>
-                        </m:ctrlPr>
-                      </m:dPr>
-                      <m:e>
-                        <m:r>
-                          <m:rPr>
-                            <m:nor/>
-                          </m:rPr>
-                          <a:rPr lang="en-US" altLang="zh-CN" sz="1200" b="0" i="0" kern="1200">
-                            <a:solidFill>
-                              <a:schemeClr val="tx1"/>
-                            </a:solidFill>
-                            <a:latin typeface="+mn-lt"/>
-                            <a:ea typeface="+mn-ea"/>
-                            <a:cs typeface="+mn-cs"/>
-                          </a:rPr>
-                          <m:t>target</m:t>
-                        </m:r>
-                        <m:r>
-                          <m:rPr>
-                            <m:nor/>
-                          </m:rPr>
-                          <a:rPr lang="en-US" altLang="zh-CN" sz="1200" b="0" i="0" kern="1200">
-                            <a:solidFill>
-                              <a:schemeClr val="tx1"/>
-                            </a:solidFill>
-                            <a:latin typeface="+mn-lt"/>
-                            <a:ea typeface="+mn-ea"/>
-                            <a:cs typeface="+mn-cs"/>
-                          </a:rPr>
-                          <m:t> </m:t>
-                        </m:r>
-                        <m:r>
-                          <m:rPr>
-                            <m:nor/>
-                          </m:rPr>
-                          <a:rPr lang="en-US" altLang="zh-CN" sz="1200" b="0" i="0" kern="1200">
-                            <a:solidFill>
-                              <a:schemeClr val="tx1"/>
-                            </a:solidFill>
-                            <a:latin typeface="+mn-lt"/>
-                            <a:ea typeface="+mn-ea"/>
-                            <a:cs typeface="+mn-cs"/>
-                          </a:rPr>
-                          <m:t>cell</m:t>
-                        </m:r>
-                        <m:r>
-                          <m:rPr>
-                            <m:nor/>
-                          </m:rPr>
-                          <a:rPr lang="en-US" altLang="zh-CN" sz="1200" b="0" i="0" kern="1200">
-                            <a:solidFill>
-                              <a:schemeClr val="tx1"/>
-                            </a:solidFill>
-                            <a:latin typeface="+mn-lt"/>
-                            <a:ea typeface="+mn-ea"/>
-                            <a:cs typeface="+mn-cs"/>
-                          </a:rPr>
-                          <m:t> </m:t>
-                        </m:r>
-                        <m:r>
-                          <m:rPr>
-                            <m:nor/>
-                          </m:rPr>
-                          <a:rPr lang="en-US" altLang="zh-CN" sz="1200" b="0" i="0" kern="1200">
-                            <a:solidFill>
-                              <a:schemeClr val="tx1"/>
-                            </a:solidFill>
-                            <a:latin typeface="+mn-lt"/>
-                            <a:ea typeface="+mn-ea"/>
-                            <a:cs typeface="+mn-cs"/>
-                          </a:rPr>
-                          <m:t>count</m:t>
-                        </m:r>
-                      </m:e>
-                      <m:e>
-                        <m:r>
-                          <m:rPr>
-                            <m:nor/>
-                          </m:rPr>
-                          <a:rPr lang="en-US" altLang="zh-CN" sz="1200" b="0" i="0" kern="1200">
-                            <a:solidFill>
-                              <a:schemeClr val="tx1"/>
-                            </a:solidFill>
-                            <a:latin typeface="+mn-lt"/>
-                            <a:ea typeface="+mn-ea"/>
-                            <a:cs typeface="+mn-cs"/>
-                          </a:rPr>
-                          <m:t>embryo</m:t>
-                        </m:r>
-                      </m:e>
-                      <m:e>
-                        <m:r>
-                          <m:rPr>
-                            <m:nor/>
-                          </m:rPr>
-                          <a:rPr lang="en-US" altLang="zh-CN" sz="1200" b="0" i="0" kern="1200">
-                            <a:solidFill>
-                              <a:schemeClr val="tx1"/>
-                            </a:solidFill>
-                            <a:latin typeface="+mn-lt"/>
-                            <a:ea typeface="+mn-ea"/>
-                            <a:cs typeface="+mn-cs"/>
-                          </a:rPr>
-                          <m:t>cell</m:t>
-                        </m:r>
-                        <m:r>
-                          <m:rPr>
-                            <m:nor/>
-                          </m:rPr>
-                          <a:rPr lang="en-US" altLang="zh-CN" sz="1200" b="0" i="0" kern="1200">
-                            <a:solidFill>
-                              <a:schemeClr val="tx1"/>
-                            </a:solidFill>
-                            <a:latin typeface="+mn-lt"/>
-                            <a:ea typeface="+mn-ea"/>
-                            <a:cs typeface="+mn-cs"/>
-                          </a:rPr>
-                          <m:t> </m:t>
-                        </m:r>
-                        <m:r>
-                          <m:rPr>
-                            <m:nor/>
-                          </m:rPr>
-                          <a:rPr lang="en-US" altLang="zh-CN" sz="1200" b="0" i="0" kern="1200">
-                            <a:solidFill>
-                              <a:schemeClr val="tx1"/>
-                            </a:solidFill>
-                            <a:latin typeface="+mn-lt"/>
-                            <a:ea typeface="+mn-ea"/>
-                            <a:cs typeface="+mn-cs"/>
-                          </a:rPr>
-                          <m:t>name</m:t>
-                        </m:r>
-                      </m:e>
-                    </m:d>
-                  </m:oMath>
-                </a14:m>
-                <a:endParaRPr lang="zh-CN" altLang="en-US" b="0" dirty="0"/>
-              </a:p>
-              <a:p>
-                <a:r>
-                  <a:rPr lang="zh-CN" altLang="zh-CN" dirty="0"/>
-                  <a:t>每条记录表示：某个同名细胞，在某个胚胎、某个目标细胞数附近的一次观测。</a:t>
-                </a:r>
-                <a:endParaRPr lang="en-US" altLang="zh-CN" dirty="0"/>
-              </a:p>
-              <a:p>
-                <a:endParaRPr lang="en-US" altLang="zh-CN" dirty="0"/>
-              </a:p>
-              <a:p>
-                <a:endParaRPr lang="en-US" altLang="zh-CN" dirty="0"/>
-              </a:p>
-              <a:p>
-                <a:r>
-                  <a:rPr lang="zh-CN" altLang="zh-CN" dirty="0"/>
-                  <a:t>在 bottom-10% 主分析下，共有 131 个 null A 下的重复瓶颈候选：2/5/8/20/29/67 个，分别对应 target 16/26/50/100/200/350。</a:t>
-                </a:r>
-                <a:endParaRPr lang="en-US" altLang="zh-CN" dirty="0"/>
-              </a:p>
-              <a:p>
-                <a:r>
-                  <a:rPr lang="zh-CN" altLang="zh-CN" dirty="0"/>
-                  <a:t>在 target 16–350 的多个尺度上，一批同名细胞比“仅保留帧内名称集合、随机打乱名称位置”的 null A 更稳定地位于强负曲率边端点。</a:t>
-                </a:r>
-              </a:p>
-              <a:p>
-                <a:endParaRPr lang="zh-CN" altLang="en-US" dirty="0"/>
-              </a:p>
-            </p:txBody>
-          </p:sp>
-        </mc:Choice>
-        <mc:Fallback>
-          <p:sp>
-            <p:nvSpPr>
-              <p:cNvPr id="3" name="备注占位符 2"/>
-              <p:cNvSpPr>
-                <a:spLocks noGrp="1"/>
-              </p:cNvSpPr>
-              <p:nvPr>
-                <p:ph type="body" idx="1"/>
-              </p:nvPr>
-            </p:nvSpPr>
-            <p:spPr/>
-            <p:txBody>
-              <a:bodyPr/>
-              <a:lstStyle/>
-              <a:p>
-                <a:r>
-                  <a:rPr lang="zh-CN" altLang="zh-CN" dirty="0"/>
-                  <a:t>每个目标细胞数单独建立候选集合</a:t>
-                </a:r>
-                <a:endParaRPr lang="en-US" altLang="zh-CN" dirty="0"/>
-              </a:p>
-              <a:p>
-                <a:endParaRPr lang="en-US" altLang="zh-CN" dirty="0"/>
-              </a:p>
-              <a:p>
-                <a:r>
-                  <a:rPr lang="zh-CN" altLang="zh-CN" dirty="0"/>
-                  <a:t>基本记录单位为：</a:t>
-                </a:r>
-                <a:r>
-                  <a:rPr lang="zh-CN" altLang="en-US" sz="1200" b="0" i="0" kern="1200">
-                    <a:solidFill>
-                      <a:schemeClr val="tx1"/>
-                    </a:solidFill>
-                    <a:latin typeface="+mn-lt"/>
-                    <a:ea typeface="+mn-ea"/>
-                    <a:cs typeface="+mn-cs"/>
-                  </a:rPr>
-                  <a:t>(</a:t>
-                </a:r>
-                <a:r>
-                  <a:rPr lang="en-US" altLang="zh-CN" sz="1200" b="0" i="0" kern="1200">
-                    <a:solidFill>
-                      <a:schemeClr val="tx1"/>
-                    </a:solidFill>
-                    <a:latin typeface="+mn-lt"/>
-                    <a:ea typeface="+mn-ea"/>
-                    <a:cs typeface="+mn-cs"/>
-                  </a:rPr>
-                  <a:t>"target cell count</a:t>
-                </a:r>
-                <a:r>
-                  <a:rPr lang="zh-CN" altLang="en-US" sz="1200" b="0" i="0" kern="1200">
-                    <a:solidFill>
-                      <a:schemeClr val="tx1"/>
-                    </a:solidFill>
-                    <a:latin typeface="+mn-lt"/>
-                    <a:ea typeface="+mn-ea"/>
-                    <a:cs typeface="+mn-cs"/>
-                  </a:rPr>
-                  <a:t>" ⓜ,</a:t>
-                </a:r>
-                <a:r>
-                  <a:rPr lang="en-US" altLang="zh-CN" sz="1200" b="0" i="0" kern="1200">
-                    <a:solidFill>
-                      <a:schemeClr val="tx1"/>
-                    </a:solidFill>
-                    <a:latin typeface="+mn-lt"/>
-                    <a:ea typeface="+mn-ea"/>
-                    <a:cs typeface="+mn-cs"/>
-                  </a:rPr>
-                  <a:t>"embryo</a:t>
-                </a:r>
-                <a:r>
-                  <a:rPr lang="zh-CN" altLang="en-US" sz="1200" b="0" i="0" kern="1200">
-                    <a:solidFill>
-                      <a:schemeClr val="tx1"/>
-                    </a:solidFill>
-                    <a:latin typeface="+mn-lt"/>
-                    <a:ea typeface="+mn-ea"/>
-                    <a:cs typeface="+mn-cs"/>
-                  </a:rPr>
-                  <a:t>" ⓜ,</a:t>
-                </a:r>
-                <a:r>
-                  <a:rPr lang="en-US" altLang="zh-CN" sz="1200" b="0" i="0" kern="1200">
-                    <a:solidFill>
-                      <a:schemeClr val="tx1"/>
-                    </a:solidFill>
-                    <a:latin typeface="+mn-lt"/>
-                    <a:ea typeface="+mn-ea"/>
-                    <a:cs typeface="+mn-cs"/>
-                  </a:rPr>
-                  <a:t>"cell name</a:t>
-                </a:r>
-                <a:r>
-                  <a:rPr lang="zh-CN" altLang="en-US" sz="1200" b="0" i="0" kern="1200">
-                    <a:solidFill>
-                      <a:schemeClr val="tx1"/>
-                    </a:solidFill>
-                    <a:latin typeface="+mn-lt"/>
-                    <a:ea typeface="+mn-ea"/>
-                    <a:cs typeface="+mn-cs"/>
-                  </a:rPr>
-                  <a:t>" )</a:t>
-                </a:r>
-                <a:endParaRPr lang="zh-CN" altLang="en-US" b="0" dirty="0"/>
-              </a:p>
-              <a:p>
-                <a:r>
-                  <a:rPr lang="zh-CN" altLang="zh-CN" dirty="0"/>
-                  <a:t>每条记录表示：某个同名细胞，在某个胚胎、某个目标细胞数附近的一次观测。</a:t>
-                </a:r>
-                <a:endParaRPr lang="en-US" altLang="zh-CN" dirty="0"/>
-              </a:p>
-              <a:p>
-                <a:endParaRPr lang="en-US" altLang="zh-CN" dirty="0"/>
-              </a:p>
-              <a:p>
-                <a:endParaRPr lang="en-US" altLang="zh-CN" dirty="0"/>
-              </a:p>
-              <a:p>
-                <a:r>
-                  <a:rPr lang="zh-CN" altLang="zh-CN" dirty="0"/>
-                  <a:t>在 bottom-10% 主分析下，共有 131 个 null A 下的重复瓶颈候选：2/5/8/20/29/67 个，分别对应 target 16/26/50/100/200/350。</a:t>
-                </a:r>
-                <a:endParaRPr lang="en-US" altLang="zh-CN" dirty="0"/>
-              </a:p>
-              <a:p>
-                <a:r>
-                  <a:rPr lang="zh-CN" altLang="zh-CN" dirty="0"/>
-                  <a:t>在 target 16–350 的多个尺度上，一批同名细胞比“仅保留帧内名称集合、随机打乱名称位置”的 null A 更稳定地位于强负曲率边端点。</a:t>
-                </a:r>
-              </a:p>
-              <a:p>
-                <a:endParaRPr lang="zh-CN" altLang="en-US" dirty="0"/>
-              </a:p>
-            </p:txBody>
-          </p:sp>
-        </mc:Fallback>
-      </mc:AlternateContent>
+      <p:sp>
+        <p:nvSpPr>
+          <p:cNvPr id="3" name="备注占位符 2"/>
+          <p:cNvSpPr>
+            <a:spLocks noGrp="1"/>
+          </p:cNvSpPr>
+          <p:nvPr>
+            <p:ph type="body" idx="1"/>
+          </p:nvPr>
+        </p:nvSpPr>
+        <p:spPr/>
+        <p:txBody>
+          <a:bodyPr/>
+          <a:lstStyle/>
+          <a:p>
+            <a:endParaRPr lang="zh-CN" altLang="en-US" dirty="0"/>
+          </a:p>
+        </p:txBody>
+      </p:sp>
       <p:sp>
         <p:nvSpPr>
           <p:cNvPr id="4" name="灯片编号占位符 3"/>
@@ -1618,376 +1279,31 @@
         </p:nvSpPr>
         <p:spPr/>
       </p:sp>
-      <mc:AlternateContent xmlns:mc="http://schemas.openxmlformats.org/markup-compatibility/2006">
-        <mc:Choice xmlns:a14="http://schemas.microsoft.com/office/drawing/2010/main" Requires="a14">
-          <p:sp>
-            <p:nvSpPr>
-              <p:cNvPr id="3" name="备注占位符 2">
-                <a:extLst>
-                  <a:ext uri="{FF2B5EF4-FFF2-40B4-BE49-F238E27FC236}">
-                    <a16:creationId xmlns:a16="http://schemas.microsoft.com/office/drawing/2014/main" id="{1F732499-98CB-3F99-3FE8-A146192F2102}"/>
-                  </a:ext>
-                </a:extLst>
-              </p:cNvPr>
-              <p:cNvSpPr>
-                <a:spLocks noGrp="1"/>
-              </p:cNvSpPr>
-              <p:nvPr>
-                <p:ph type="body" idx="1"/>
-              </p:nvPr>
-            </p:nvSpPr>
-            <p:spPr/>
-            <p:txBody>
-              <a:bodyPr/>
-              <a:lstStyle/>
-              <a:p>
-                <a:r>
-                  <a:rPr lang="zh-CN" altLang="zh-CN" dirty="0"/>
-                  <a:t>每个目标细胞数单独建立候选集合</a:t>
-                </a:r>
-                <a:endParaRPr lang="en-US" altLang="zh-CN" dirty="0"/>
-              </a:p>
-              <a:p>
-                <a:endParaRPr lang="en-US" altLang="zh-CN" dirty="0"/>
-              </a:p>
-              <a:p>
-                <a:r>
-                  <a:rPr lang="zh-CN" altLang="zh-CN" dirty="0"/>
-                  <a:t>基本记录单位为：</a:t>
-                </a:r>
-                <a14:m>
-                  <m:oMath xmlns:m="http://schemas.openxmlformats.org/officeDocument/2006/math">
-                    <m:d>
-                      <m:dPr>
-                        <m:sepChr m:val=","/>
-                        <m:ctrlPr>
-                          <a:rPr lang="zh-CN" altLang="en-US" sz="1200" b="0" kern="1200">
-                            <a:solidFill>
-                              <a:schemeClr val="tx1"/>
-                            </a:solidFill>
-                            <a:latin typeface="+mn-lt"/>
-                            <a:ea typeface="+mn-ea"/>
-                            <a:cs typeface="+mn-cs"/>
-                          </a:rPr>
-                        </m:ctrlPr>
-                      </m:dPr>
-                      <m:e>
-                        <m:r>
-                          <m:rPr>
-                            <m:nor/>
-                          </m:rPr>
-                          <a:rPr lang="en-US" altLang="zh-CN" sz="1200" b="0" i="0" kern="1200">
-                            <a:solidFill>
-                              <a:schemeClr val="tx1"/>
-                            </a:solidFill>
-                            <a:latin typeface="+mn-lt"/>
-                            <a:ea typeface="+mn-ea"/>
-                            <a:cs typeface="+mn-cs"/>
-                          </a:rPr>
-                          <m:t>target</m:t>
-                        </m:r>
-                        <m:r>
-                          <m:rPr>
-                            <m:nor/>
-                          </m:rPr>
-                          <a:rPr lang="en-US" altLang="zh-CN" sz="1200" b="0" i="0" kern="1200">
-                            <a:solidFill>
-                              <a:schemeClr val="tx1"/>
-                            </a:solidFill>
-                            <a:latin typeface="+mn-lt"/>
-                            <a:ea typeface="+mn-ea"/>
-                            <a:cs typeface="+mn-cs"/>
-                          </a:rPr>
-                          <m:t> </m:t>
-                        </m:r>
-                        <m:r>
-                          <m:rPr>
-                            <m:nor/>
-                          </m:rPr>
-                          <a:rPr lang="en-US" altLang="zh-CN" sz="1200" b="0" i="0" kern="1200">
-                            <a:solidFill>
-                              <a:schemeClr val="tx1"/>
-                            </a:solidFill>
-                            <a:latin typeface="+mn-lt"/>
-                            <a:ea typeface="+mn-ea"/>
-                            <a:cs typeface="+mn-cs"/>
-                          </a:rPr>
-                          <m:t>cell</m:t>
-                        </m:r>
-                        <m:r>
-                          <m:rPr>
-                            <m:nor/>
-                          </m:rPr>
-                          <a:rPr lang="en-US" altLang="zh-CN" sz="1200" b="0" i="0" kern="1200">
-                            <a:solidFill>
-                              <a:schemeClr val="tx1"/>
-                            </a:solidFill>
-                            <a:latin typeface="+mn-lt"/>
-                            <a:ea typeface="+mn-ea"/>
-                            <a:cs typeface="+mn-cs"/>
-                          </a:rPr>
-                          <m:t> </m:t>
-                        </m:r>
-                        <m:r>
-                          <m:rPr>
-                            <m:nor/>
-                          </m:rPr>
-                          <a:rPr lang="en-US" altLang="zh-CN" sz="1200" b="0" i="0" kern="1200">
-                            <a:solidFill>
-                              <a:schemeClr val="tx1"/>
-                            </a:solidFill>
-                            <a:latin typeface="+mn-lt"/>
-                            <a:ea typeface="+mn-ea"/>
-                            <a:cs typeface="+mn-cs"/>
-                          </a:rPr>
-                          <m:t>count</m:t>
-                        </m:r>
-                      </m:e>
-                      <m:e>
-                        <m:r>
-                          <m:rPr>
-                            <m:nor/>
-                          </m:rPr>
-                          <a:rPr lang="en-US" altLang="zh-CN" sz="1200" b="0" i="0" kern="1200">
-                            <a:solidFill>
-                              <a:schemeClr val="tx1"/>
-                            </a:solidFill>
-                            <a:latin typeface="+mn-lt"/>
-                            <a:ea typeface="+mn-ea"/>
-                            <a:cs typeface="+mn-cs"/>
-                          </a:rPr>
-                          <m:t>embryo</m:t>
-                        </m:r>
-                      </m:e>
-                      <m:e>
-                        <m:r>
-                          <m:rPr>
-                            <m:nor/>
-                          </m:rPr>
-                          <a:rPr lang="en-US" altLang="zh-CN" sz="1200" b="0" i="0" kern="1200">
-                            <a:solidFill>
-                              <a:schemeClr val="tx1"/>
-                            </a:solidFill>
-                            <a:latin typeface="+mn-lt"/>
-                            <a:ea typeface="+mn-ea"/>
-                            <a:cs typeface="+mn-cs"/>
-                          </a:rPr>
-                          <m:t>cell</m:t>
-                        </m:r>
-                        <m:r>
-                          <m:rPr>
-                            <m:nor/>
-                          </m:rPr>
-                          <a:rPr lang="en-US" altLang="zh-CN" sz="1200" b="0" i="0" kern="1200">
-                            <a:solidFill>
-                              <a:schemeClr val="tx1"/>
-                            </a:solidFill>
-                            <a:latin typeface="+mn-lt"/>
-                            <a:ea typeface="+mn-ea"/>
-                            <a:cs typeface="+mn-cs"/>
-                          </a:rPr>
-                          <m:t> </m:t>
-                        </m:r>
-                        <m:r>
-                          <m:rPr>
-                            <m:nor/>
-                          </m:rPr>
-                          <a:rPr lang="en-US" altLang="zh-CN" sz="1200" b="0" i="0" kern="1200">
-                            <a:solidFill>
-                              <a:schemeClr val="tx1"/>
-                            </a:solidFill>
-                            <a:latin typeface="+mn-lt"/>
-                            <a:ea typeface="+mn-ea"/>
-                            <a:cs typeface="+mn-cs"/>
-                          </a:rPr>
-                          <m:t>name</m:t>
-                        </m:r>
-                      </m:e>
-                    </m:d>
-                  </m:oMath>
-                </a14:m>
-                <a:endParaRPr lang="zh-CN" altLang="en-US" b="0" dirty="0"/>
-              </a:p>
-              <a:p>
-                <a:r>
-                  <a:rPr lang="zh-CN" altLang="zh-CN" dirty="0"/>
-                  <a:t>每条记录表示：某个同名细胞，在某个胚胎、某个目标细胞数附近的一次观测。</a:t>
-                </a:r>
-                <a:endParaRPr lang="en-US" altLang="zh-CN" dirty="0"/>
-              </a:p>
-              <a:p>
-                <a:endParaRPr lang="en-US" altLang="zh-CN" dirty="0"/>
-              </a:p>
-              <a:p>
-                <a:endParaRPr lang="en-US" altLang="zh-CN" dirty="0"/>
-              </a:p>
-              <a:p>
-                <a:r>
-                  <a:rPr lang="zh-CN" altLang="zh-CN" dirty="0"/>
-                  <a:t>在 bottom-10% 主分析下，共有 131 个 null A 下的重复瓶颈候选：2/5/8/20/29/67 个，分别对应 target 16/26/50/100/200/350。</a:t>
-                </a:r>
-                <a:endParaRPr lang="en-US" altLang="zh-CN" dirty="0"/>
-              </a:p>
-              <a:p>
-                <a:r>
-                  <a:rPr lang="zh-CN" altLang="zh-CN" dirty="0"/>
-                  <a:t>在 target 16–350 的多个尺度上，一批同名细胞比“仅保留帧内名称集合、随机打乱名称位置”的 null A 更稳定地位于强负曲率边端点。</a:t>
-                </a:r>
-              </a:p>
-              <a:p>
-                <a:endParaRPr lang="zh-CN" altLang="en-US" dirty="0"/>
-              </a:p>
-            </p:txBody>
-          </p:sp>
-        </mc:Choice>
-        <mc:Fallback>
-          <p:sp>
-            <p:nvSpPr>
-              <p:cNvPr id="3" name="备注占位符 2">
-                <a:extLst>
-                  <a:ext uri="{FF2B5EF4-FFF2-40B4-BE49-F238E27FC236}">
-                    <a16:creationId xmlns:a16="http://schemas.microsoft.com/office/drawing/2014/main" id="{1F732499-98CB-3F99-3FE8-A146192F2102}"/>
-                  </a:ext>
-                </a:extLst>
-              </p:cNvPr>
-              <p:cNvSpPr>
-                <a:spLocks noGrp="1"/>
-              </p:cNvSpPr>
-              <p:nvPr>
-                <p:ph type="body" idx="1"/>
-              </p:nvPr>
-            </p:nvSpPr>
-            <p:spPr/>
-            <p:txBody>
-              <a:bodyPr/>
-              <a:lstStyle/>
-              <a:p>
-                <a:r>
-                  <a:rPr lang="zh-CN" altLang="zh-CN" dirty="0"/>
-                  <a:t>每个目标细胞数单独建立候选集合</a:t>
-                </a:r>
-                <a:endParaRPr lang="en-US" altLang="zh-CN" dirty="0"/>
-              </a:p>
-              <a:p>
-                <a:endParaRPr lang="en-US" altLang="zh-CN" dirty="0"/>
-              </a:p>
-              <a:p>
-                <a:r>
-                  <a:rPr lang="zh-CN" altLang="zh-CN" dirty="0"/>
-                  <a:t>基本记录单位为：</a:t>
-                </a:r>
-                <a:r>
-                  <a:rPr lang="zh-CN" altLang="en-US" sz="1200" b="0" i="0" kern="1200">
-                    <a:solidFill>
-                      <a:schemeClr val="tx1"/>
-                    </a:solidFill>
-                    <a:latin typeface="+mn-lt"/>
-                    <a:ea typeface="+mn-ea"/>
-                    <a:cs typeface="+mn-cs"/>
-                  </a:rPr>
-                  <a:t>(</a:t>
-                </a:r>
-                <a:r>
-                  <a:rPr lang="en-US" altLang="zh-CN" sz="1200" b="0" i="0" kern="1200">
-                    <a:solidFill>
-                      <a:schemeClr val="tx1"/>
-                    </a:solidFill>
-                    <a:latin typeface="+mn-lt"/>
-                    <a:ea typeface="+mn-ea"/>
-                    <a:cs typeface="+mn-cs"/>
-                  </a:rPr>
-                  <a:t>"target cell count</a:t>
-                </a:r>
-                <a:r>
-                  <a:rPr lang="zh-CN" altLang="en-US" sz="1200" b="0" i="0" kern="1200">
-                    <a:solidFill>
-                      <a:schemeClr val="tx1"/>
-                    </a:solidFill>
-                    <a:latin typeface="+mn-lt"/>
-                    <a:ea typeface="+mn-ea"/>
-                    <a:cs typeface="+mn-cs"/>
-                  </a:rPr>
-                  <a:t>" ⓜ,</a:t>
-                </a:r>
-                <a:r>
-                  <a:rPr lang="en-US" altLang="zh-CN" sz="1200" b="0" i="0" kern="1200">
-                    <a:solidFill>
-                      <a:schemeClr val="tx1"/>
-                    </a:solidFill>
-                    <a:latin typeface="+mn-lt"/>
-                    <a:ea typeface="+mn-ea"/>
-                    <a:cs typeface="+mn-cs"/>
-                  </a:rPr>
-                  <a:t>"embryo</a:t>
-                </a:r>
-                <a:r>
-                  <a:rPr lang="zh-CN" altLang="en-US" sz="1200" b="0" i="0" kern="1200">
-                    <a:solidFill>
-                      <a:schemeClr val="tx1"/>
-                    </a:solidFill>
-                    <a:latin typeface="+mn-lt"/>
-                    <a:ea typeface="+mn-ea"/>
-                    <a:cs typeface="+mn-cs"/>
-                  </a:rPr>
-                  <a:t>" ⓜ,</a:t>
-                </a:r>
-                <a:r>
-                  <a:rPr lang="en-US" altLang="zh-CN" sz="1200" b="0" i="0" kern="1200">
-                    <a:solidFill>
-                      <a:schemeClr val="tx1"/>
-                    </a:solidFill>
-                    <a:latin typeface="+mn-lt"/>
-                    <a:ea typeface="+mn-ea"/>
-                    <a:cs typeface="+mn-cs"/>
-                  </a:rPr>
-                  <a:t>"cell name</a:t>
-                </a:r>
-                <a:r>
-                  <a:rPr lang="zh-CN" altLang="en-US" sz="1200" b="0" i="0" kern="1200">
-                    <a:solidFill>
-                      <a:schemeClr val="tx1"/>
-                    </a:solidFill>
-                    <a:latin typeface="+mn-lt"/>
-                    <a:ea typeface="+mn-ea"/>
-                    <a:cs typeface="+mn-cs"/>
-                  </a:rPr>
-                  <a:t>" )</a:t>
-                </a:r>
-                <a:endParaRPr lang="zh-CN" altLang="en-US" b="0" dirty="0"/>
-              </a:p>
-              <a:p>
-                <a:r>
-                  <a:rPr lang="zh-CN" altLang="zh-CN" dirty="0"/>
-                  <a:t>每条记录表示：某个同名细胞，在某个胚胎、某个目标细胞数附近的一次观测。</a:t>
-                </a:r>
-                <a:endParaRPr lang="en-US" altLang="zh-CN" dirty="0"/>
-              </a:p>
-              <a:p>
-                <a:endParaRPr lang="en-US" altLang="zh-CN" dirty="0"/>
-              </a:p>
-              <a:p>
-                <a:endParaRPr lang="en-US" altLang="zh-CN" dirty="0"/>
-              </a:p>
-              <a:p>
-                <a:r>
-                  <a:rPr lang="zh-CN" altLang="zh-CN" dirty="0"/>
-                  <a:t>在 bottom-10% 主分析下，共有 131 个 null A 下的重复瓶颈候选：2/5/8/20/29/67 个，分别对应 target 16/26/50/100/200/350。</a:t>
-                </a:r>
-                <a:endParaRPr lang="en-US" altLang="zh-CN" dirty="0"/>
-              </a:p>
-              <a:p>
-                <a:r>
-                  <a:rPr lang="zh-CN" altLang="zh-CN" dirty="0"/>
-                  <a:t>在 target 16–350 的多个尺度上，一批同名细胞比“仅保留帧内名称集合、随机打乱名称位置”的 null A 更稳定地位于强负曲率边端点。</a:t>
-                </a:r>
-              </a:p>
-              <a:p>
-                <a:endParaRPr lang="zh-CN" altLang="en-US" dirty="0"/>
-              </a:p>
-            </p:txBody>
-          </p:sp>
-        </mc:Fallback>
-      </mc:AlternateContent>
+      <p:sp>
+        <p:nvSpPr>
+          <p:cNvPr id="3" name="备注占位符 2">
+            <a:extLst>
+              <a:ext uri="{FF2B5EF4-FFF2-40B4-BE49-F238E27FC236}">
+                <a16:creationId xmlns:a16="http://schemas.microsoft.com/office/drawing/2014/main" id="{1F732499-98CB-3F99-3FE8-A146192F2102}"/>
+              </a:ext>
+            </a:extLst>
+          </p:cNvPr>
+          <p:cNvSpPr>
+            <a:spLocks noGrp="1"/>
+          </p:cNvSpPr>
+          <p:nvPr>
+            <p:ph type="body" idx="1"/>
+          </p:nvPr>
+        </p:nvSpPr>
+        <p:spPr/>
+        <p:txBody>
+          <a:bodyPr/>
+          <a:lstStyle/>
+          <a:p>
+            <a:endParaRPr lang="zh-CN" altLang="en-US" dirty="0"/>
+          </a:p>
+        </p:txBody>
+      </p:sp>
       <p:sp>
         <p:nvSpPr>
           <p:cNvPr id="4" name="灯片编号占位符 3">
@@ -8465,6 +7781,42 @@
           <a:chExt cx="0" cy="0"/>
         </a:xfrm>
       </p:grpSpPr>
+      <p:pic>
+        <p:nvPicPr>
+          <p:cNvPr id="30" name="图片 29">
+            <a:extLst>
+              <a:ext uri="{FF2B5EF4-FFF2-40B4-BE49-F238E27FC236}">
+                <a16:creationId xmlns:a16="http://schemas.microsoft.com/office/drawing/2014/main" id="{3476F25D-B205-EC3D-C5A7-66BB17895AEB}"/>
+              </a:ext>
+            </a:extLst>
+          </p:cNvPr>
+          <p:cNvPicPr>
+            <a:picLocks noChangeAspect="1"/>
+          </p:cNvPicPr>
+          <p:nvPr/>
+        </p:nvPicPr>
+        <p:blipFill>
+          <a:blip r:embed="rId2">
+            <a:extLst>
+              <a:ext uri="{28A0092B-C50C-407E-A947-70E740481C1C}">
+                <a14:useLocalDpi xmlns:a14="http://schemas.microsoft.com/office/drawing/2010/main" val="0"/>
+              </a:ext>
+            </a:extLst>
+          </a:blip>
+          <a:stretch>
+            <a:fillRect/>
+          </a:stretch>
+        </p:blipFill>
+        <p:spPr>
+          <a:xfrm>
+            <a:off x="148342" y="633480"/>
+            <a:ext cx="8057562" cy="6224520"/>
+          </a:xfrm>
+          <a:prstGeom prst="rect">
+            <a:avLst/>
+          </a:prstGeom>
+        </p:spPr>
+      </p:pic>
       <p:sp>
         <p:nvSpPr>
           <p:cNvPr id="5" name="文本框 4">
@@ -8962,68 +8314,6 @@
           </a:graphicData>
         </a:graphic>
       </p:graphicFrame>
-      <p:pic>
-        <p:nvPicPr>
-          <p:cNvPr id="13" name="图片 12">
-            <a:extLst>
-              <a:ext uri="{FF2B5EF4-FFF2-40B4-BE49-F238E27FC236}">
-                <a16:creationId xmlns:a16="http://schemas.microsoft.com/office/drawing/2014/main" id="{93987922-13DB-E810-E26A-327214CB5A61}"/>
-              </a:ext>
-            </a:extLst>
-          </p:cNvPr>
-          <p:cNvPicPr>
-            <a:picLocks noChangeAspect="1"/>
-          </p:cNvPicPr>
-          <p:nvPr/>
-        </p:nvPicPr>
-        <p:blipFill>
-          <a:blip r:embed="rId2"/>
-          <a:srcRect l="10167" t="7013" b="4097"/>
-          <a:stretch>
-            <a:fillRect/>
-          </a:stretch>
-        </p:blipFill>
-        <p:spPr>
-          <a:xfrm>
-            <a:off x="149178" y="865550"/>
-            <a:ext cx="7492044" cy="5656694"/>
-          </a:xfrm>
-          <a:prstGeom prst="rect">
-            <a:avLst/>
-          </a:prstGeom>
-        </p:spPr>
-      </p:pic>
-      <p:pic>
-        <p:nvPicPr>
-          <p:cNvPr id="14" name="图片 13">
-            <a:extLst>
-              <a:ext uri="{FF2B5EF4-FFF2-40B4-BE49-F238E27FC236}">
-                <a16:creationId xmlns:a16="http://schemas.microsoft.com/office/drawing/2014/main" id="{3F2BC387-2DE9-17EF-C08B-0CE2A4350492}"/>
-              </a:ext>
-            </a:extLst>
-          </p:cNvPr>
-          <p:cNvPicPr>
-            <a:picLocks noChangeAspect="1"/>
-          </p:cNvPicPr>
-          <p:nvPr/>
-        </p:nvPicPr>
-        <p:blipFill>
-          <a:blip r:embed="rId2"/>
-          <a:srcRect l="-18" t="148" r="8799" b="95473"/>
-          <a:stretch>
-            <a:fillRect/>
-          </a:stretch>
-        </p:blipFill>
-        <p:spPr>
-          <a:xfrm>
-            <a:off x="287606" y="627494"/>
-            <a:ext cx="7215188" cy="264318"/>
-          </a:xfrm>
-          <a:prstGeom prst="rect">
-            <a:avLst/>
-          </a:prstGeom>
-        </p:spPr>
-      </p:pic>
       <p:sp>
         <p:nvSpPr>
           <p:cNvPr id="16" name="文本框 15">
@@ -9038,8 +8328,8 @@
         </p:nvSpPr>
         <p:spPr>
           <a:xfrm>
-            <a:off x="7563477" y="865550"/>
-            <a:ext cx="4628523" cy="1705403"/>
+            <a:off x="8205904" y="865550"/>
+            <a:ext cx="3837756" cy="1705403"/>
           </a:xfrm>
           <a:prstGeom prst="rect">
             <a:avLst/>
@@ -9176,8 +8466,8 @@
         </p:nvSpPr>
         <p:spPr>
           <a:xfrm>
-            <a:off x="7563477" y="2863101"/>
-            <a:ext cx="4628523" cy="874407"/>
+            <a:off x="8205904" y="2863101"/>
+            <a:ext cx="3837756" cy="874407"/>
           </a:xfrm>
           <a:prstGeom prst="rect">
             <a:avLst/>
@@ -9240,168 +8530,6 @@
               <a:latin typeface="微软雅黑" panose="020B0503020204020204" pitchFamily="34" charset="-122"/>
               <a:ea typeface="微软雅黑" panose="020B0503020204020204" pitchFamily="34" charset="-122"/>
             </a:endParaRPr>
-          </a:p>
-        </p:txBody>
-      </p:sp>
-      <p:sp>
-        <p:nvSpPr>
-          <p:cNvPr id="20" name="矩形 19">
-            <a:extLst>
-              <a:ext uri="{FF2B5EF4-FFF2-40B4-BE49-F238E27FC236}">
-                <a16:creationId xmlns:a16="http://schemas.microsoft.com/office/drawing/2014/main" id="{1DC831C7-0F37-84EE-8978-08EC3263B183}"/>
-              </a:ext>
-            </a:extLst>
-          </p:cNvPr>
-          <p:cNvSpPr/>
-          <p:nvPr/>
-        </p:nvSpPr>
-        <p:spPr>
-          <a:xfrm>
-            <a:off x="3895200" y="3629025"/>
-            <a:ext cx="305325" cy="342900"/>
-          </a:xfrm>
-          <a:prstGeom prst="rect">
-            <a:avLst/>
-          </a:prstGeom>
-          <a:noFill/>
-          <a:ln w="19050" cap="flat" cmpd="sng" algn="ctr">
-            <a:solidFill>
-              <a:srgbClr val="FF0000"/>
-            </a:solidFill>
-            <a:prstDash val="solid"/>
-            <a:round/>
-            <a:headEnd type="none" w="med" len="med"/>
-            <a:tailEnd type="none" w="med" len="med"/>
-          </a:ln>
-        </p:spPr>
-        <p:style>
-          <a:lnRef idx="0">
-            <a:scrgbClr r="0" g="0" b="0"/>
-          </a:lnRef>
-          <a:fillRef idx="0">
-            <a:scrgbClr r="0" g="0" b="0"/>
-          </a:fillRef>
-          <a:effectRef idx="0">
-            <a:scrgbClr r="0" g="0" b="0"/>
-          </a:effectRef>
-          <a:fontRef idx="minor">
-            <a:schemeClr val="dk1"/>
-          </a:fontRef>
-        </p:style>
-        <p:txBody>
-          <a:bodyPr rtlCol="0" anchor="ctr"/>
-          <a:lstStyle/>
-          <a:p>
-            <a:pPr algn="ctr"/>
-            <a:endParaRPr lang="zh-CN" altLang="en-US"/>
-          </a:p>
-        </p:txBody>
-      </p:sp>
-      <p:sp>
-        <p:nvSpPr>
-          <p:cNvPr id="21" name="矩形 20">
-            <a:extLst>
-              <a:ext uri="{FF2B5EF4-FFF2-40B4-BE49-F238E27FC236}">
-                <a16:creationId xmlns:a16="http://schemas.microsoft.com/office/drawing/2014/main" id="{3776BCB8-99AB-D089-5244-346316EA8EF5}"/>
-              </a:ext>
-            </a:extLst>
-          </p:cNvPr>
-          <p:cNvSpPr/>
-          <p:nvPr/>
-        </p:nvSpPr>
-        <p:spPr>
-          <a:xfrm>
-            <a:off x="3548503" y="3192678"/>
-            <a:ext cx="305325" cy="342900"/>
-          </a:xfrm>
-          <a:prstGeom prst="rect">
-            <a:avLst/>
-          </a:prstGeom>
-          <a:noFill/>
-          <a:ln w="19050" cap="flat" cmpd="sng" algn="ctr">
-            <a:solidFill>
-              <a:srgbClr val="FF0000"/>
-            </a:solidFill>
-            <a:prstDash val="solid"/>
-            <a:round/>
-            <a:headEnd type="none" w="med" len="med"/>
-            <a:tailEnd type="none" w="med" len="med"/>
-          </a:ln>
-        </p:spPr>
-        <p:style>
-          <a:lnRef idx="0">
-            <a:scrgbClr r="0" g="0" b="0"/>
-          </a:lnRef>
-          <a:fillRef idx="0">
-            <a:scrgbClr r="0" g="0" b="0"/>
-          </a:fillRef>
-          <a:effectRef idx="0">
-            <a:scrgbClr r="0" g="0" b="0"/>
-          </a:effectRef>
-          <a:fontRef idx="minor">
-            <a:schemeClr val="dk1"/>
-          </a:fontRef>
-        </p:style>
-        <p:txBody>
-          <a:bodyPr rtlCol="0" anchor="ctr"/>
-          <a:lstStyle/>
-          <a:p>
-            <a:pPr algn="ctr"/>
-            <a:endParaRPr lang="zh-CN" altLang="en-US"/>
-          </a:p>
-        </p:txBody>
-      </p:sp>
-      <p:sp>
-        <p:nvSpPr>
-          <p:cNvPr id="26" name="矩形 25">
-            <a:extLst>
-              <a:ext uri="{FF2B5EF4-FFF2-40B4-BE49-F238E27FC236}">
-                <a16:creationId xmlns:a16="http://schemas.microsoft.com/office/drawing/2014/main" id="{C2CE5195-3A91-2D01-96B8-C5EE679724C0}"/>
-              </a:ext>
-            </a:extLst>
-          </p:cNvPr>
-          <p:cNvSpPr/>
-          <p:nvPr/>
-        </p:nvSpPr>
-        <p:spPr>
-          <a:xfrm>
-            <a:off x="2573143" y="3394608"/>
-            <a:ext cx="305325" cy="342900"/>
-          </a:xfrm>
-          <a:prstGeom prst="rect">
-            <a:avLst/>
-          </a:prstGeom>
-          <a:noFill/>
-          <a:ln w="19050" cap="flat" cmpd="sng" algn="ctr">
-            <a:solidFill>
-              <a:srgbClr val="FF0000"/>
-            </a:solidFill>
-            <a:prstDash val="solid"/>
-            <a:round/>
-            <a:headEnd type="none" w="med" len="med"/>
-            <a:tailEnd type="none" w="med" len="med"/>
-          </a:ln>
-        </p:spPr>
-        <p:style>
-          <a:lnRef idx="0">
-            <a:scrgbClr r="0" g="0" b="0"/>
-          </a:lnRef>
-          <a:fillRef idx="0">
-            <a:scrgbClr r="0" g="0" b="0"/>
-          </a:fillRef>
-          <a:effectRef idx="0">
-            <a:scrgbClr r="0" g="0" b="0"/>
-          </a:effectRef>
-          <a:fontRef idx="minor">
-            <a:schemeClr val="dk1"/>
-          </a:fontRef>
-        </p:style>
-        <p:txBody>
-          <a:bodyPr rtlCol="0" anchor="ctr"/>
-          <a:lstStyle/>
-          <a:p>
-            <a:pPr algn="ctr"/>
-            <a:endParaRPr lang="zh-CN" altLang="en-US"/>
           </a:p>
         </p:txBody>
       </p:sp>
@@ -18862,8 +17990,8 @@
         </p:nvSpPr>
         <p:spPr>
           <a:xfrm>
-            <a:off x="148341" y="3882900"/>
-            <a:ext cx="11724572" cy="1200329"/>
+            <a:off x="148341" y="3885510"/>
+            <a:ext cx="4432537" cy="2585323"/>
           </a:xfrm>
           <a:prstGeom prst="rect">
             <a:avLst/>
@@ -18920,7 +18048,21 @@
                 <a:latin typeface="微软雅黑" panose="020B0503020204020204" pitchFamily="34" charset="-122"/>
                 <a:ea typeface="微软雅黑" panose="020B0503020204020204" pitchFamily="34" charset="-122"/>
               </a:rPr>
-              <a:t>，表明较晚阶段出现更清晰的拓扑分区。</a:t>
+              <a:t>，表明</a:t>
+            </a:r>
+            <a:r>
+              <a:rPr lang="zh-CN" altLang="en-US" b="1" dirty="0">
+                <a:latin typeface="微软雅黑" panose="020B0503020204020204" pitchFamily="34" charset="-122"/>
+                <a:ea typeface="微软雅黑" panose="020B0503020204020204" pitchFamily="34" charset="-122"/>
+              </a:rPr>
+              <a:t>较晚阶段出现更清晰的拓扑分区</a:t>
+            </a:r>
+            <a:r>
+              <a:rPr lang="zh-CN" altLang="en-US" dirty="0">
+                <a:latin typeface="微软雅黑" panose="020B0503020204020204" pitchFamily="34" charset="-122"/>
+                <a:ea typeface="微软雅黑" panose="020B0503020204020204" pitchFamily="34" charset="-122"/>
+              </a:rPr>
+              <a:t>。</a:t>
             </a:r>
             <a:endParaRPr lang="en-US" altLang="zh-CN" dirty="0">
               <a:latin typeface="微软雅黑" panose="020B0503020204020204" pitchFamily="34" charset="-122"/>
@@ -18933,18 +18075,25 @@
               <a:buChar char="Ø"/>
             </a:pPr>
             <a:r>
-              <a:rPr lang="en-US" altLang="zh-CN" dirty="0">
-                <a:latin typeface="微软雅黑" panose="020B0503020204020204" pitchFamily="34" charset="-122"/>
-                <a:ea typeface="微软雅黑" panose="020B0503020204020204" pitchFamily="34" charset="-122"/>
-              </a:rPr>
-              <a:t>P3</a:t>
-            </a:r>
-            <a:r>
               <a:rPr lang="zh-CN" altLang="en-US" dirty="0">
                 <a:latin typeface="微软雅黑" panose="020B0503020204020204" pitchFamily="34" charset="-122"/>
                 <a:ea typeface="微软雅黑" panose="020B0503020204020204" pitchFamily="34" charset="-122"/>
               </a:rPr>
-              <a:t>：细胞空间图从早期完全图的高正曲率，逐渐过渡到后期接近零或轻微负曲率的局部近邻结构</a:t>
+              <a:t>细胞空间图从早期完全图的高正曲率，逐渐过渡到</a:t>
+            </a:r>
+            <a:r>
+              <a:rPr lang="zh-CN" altLang="en-US" b="1" dirty="0">
+                <a:latin typeface="微软雅黑" panose="020B0503020204020204" pitchFamily="34" charset="-122"/>
+                <a:ea typeface="微软雅黑" panose="020B0503020204020204" pitchFamily="34" charset="-122"/>
+              </a:rPr>
+              <a:t>后期接近零或轻微负曲率的局部近邻结构</a:t>
+            </a:r>
+            <a:r>
+              <a:rPr lang="zh-CN" altLang="en-US" dirty="0">
+                <a:latin typeface="微软雅黑" panose="020B0503020204020204" pitchFamily="34" charset="-122"/>
+                <a:ea typeface="微软雅黑" panose="020B0503020204020204" pitchFamily="34" charset="-122"/>
+              </a:rPr>
+              <a:t>。</a:t>
             </a:r>
             <a:endParaRPr lang="en-US" altLang="zh-CN" dirty="0">
               <a:latin typeface="微软雅黑" panose="020B0503020204020204" pitchFamily="34" charset="-122"/>
@@ -18957,52 +18106,32 @@
               <a:buChar char="Ø"/>
             </a:pPr>
             <a:r>
+              <a:rPr lang="zh-CN" altLang="en-US" b="1" dirty="0">
+                <a:latin typeface="微软雅黑" panose="020B0503020204020204" pitchFamily="34" charset="-122"/>
+                <a:ea typeface="微软雅黑" panose="020B0503020204020204" pitchFamily="34" charset="-122"/>
+              </a:rPr>
+              <a:t>跨社区边的曲率显著低于社区内部边</a:t>
+            </a:r>
+            <a:r>
+              <a:rPr lang="zh-CN" altLang="en-US" dirty="0">
+                <a:latin typeface="微软雅黑" panose="020B0503020204020204" pitchFamily="34" charset="-122"/>
+                <a:ea typeface="微软雅黑" panose="020B0503020204020204" pitchFamily="34" charset="-122"/>
+              </a:rPr>
+              <a:t>，负曲率能够识别图结构中的社区边界，其中 </a:t>
+            </a:r>
+            <a:r>
               <a:rPr lang="en-US" altLang="zh-CN" dirty="0">
                 <a:latin typeface="微软雅黑" panose="020B0503020204020204" pitchFamily="34" charset="-122"/>
                 <a:ea typeface="微软雅黑" panose="020B0503020204020204" pitchFamily="34" charset="-122"/>
               </a:rPr>
-              <a:t>P8</a:t>
+              <a:t>hop ORC </a:t>
             </a:r>
             <a:r>
               <a:rPr lang="zh-CN" altLang="en-US" dirty="0">
                 <a:latin typeface="微软雅黑" panose="020B0503020204020204" pitchFamily="34" charset="-122"/>
                 <a:ea typeface="微软雅黑" panose="020B0503020204020204" pitchFamily="34" charset="-122"/>
               </a:rPr>
-              <a:t>：跨社区边的曲率显著低于社区内部边，负曲率能够识别图结构中的社区边界，其中 </a:t>
-            </a:r>
-            <a:r>
-              <a:rPr lang="en-US" altLang="zh-CN" dirty="0">
-                <a:latin typeface="微软雅黑" panose="020B0503020204020204" pitchFamily="34" charset="-122"/>
-                <a:ea typeface="微软雅黑" panose="020B0503020204020204" pitchFamily="34" charset="-122"/>
-              </a:rPr>
-              <a:t>hop ORC </a:t>
-            </a:r>
-            <a:r>
-              <a:rPr lang="zh-CN" altLang="en-US" dirty="0">
-                <a:latin typeface="微软雅黑" panose="020B0503020204020204" pitchFamily="34" charset="-122"/>
-                <a:ea typeface="微软雅黑" panose="020B0503020204020204" pitchFamily="34" charset="-122"/>
-              </a:rPr>
-              <a:t>表现最好；</a:t>
-            </a:r>
-            <a:br>
-              <a:rPr lang="en-US" altLang="zh-CN" dirty="0">
-                <a:latin typeface="微软雅黑" panose="020B0503020204020204" pitchFamily="34" charset="-122"/>
-                <a:ea typeface="微软雅黑" panose="020B0503020204020204" pitchFamily="34" charset="-122"/>
-              </a:rPr>
-            </a:br>
-            <a:r>
-              <a:rPr lang="en-US" altLang="zh-CN" dirty="0">
-                <a:latin typeface="微软雅黑" panose="020B0503020204020204" pitchFamily="34" charset="-122"/>
-                <a:ea typeface="微软雅黑" panose="020B0503020204020204" pitchFamily="34" charset="-122"/>
-              </a:rPr>
-              <a:t>	</a:t>
-            </a:r>
-            <a:r>
-              <a:rPr lang="zh-CN" altLang="en-US" dirty="0">
-                <a:latin typeface="微软雅黑" panose="020B0503020204020204" pitchFamily="34" charset="-122"/>
-                <a:ea typeface="微软雅黑" panose="020B0503020204020204" pitchFamily="34" charset="-122"/>
-              </a:rPr>
-              <a:t>这种对应关系在早期最清楚，随后逐渐减弱。</a:t>
+              <a:t>表现最好；这种对应关系在早期最清楚，随后逐渐减弱。</a:t>
             </a:r>
             <a:endParaRPr lang="en-US" altLang="zh-CN" dirty="0">
               <a:latin typeface="微软雅黑" panose="020B0503020204020204" pitchFamily="34" charset="-122"/>
@@ -20346,7 +19475,7 @@
         </p:nvSpPr>
         <p:spPr>
           <a:xfrm>
-            <a:off x="287606" y="3386943"/>
+            <a:off x="287606" y="3389553"/>
             <a:ext cx="8770669" cy="461665"/>
           </a:xfrm>
           <a:prstGeom prst="rect">
@@ -20374,36 +19503,6 @@
           </a:p>
         </p:txBody>
       </p:sp>
-      <p:pic>
-        <p:nvPicPr>
-          <p:cNvPr id="6" name="图片 5">
-            <a:extLst>
-              <a:ext uri="{FF2B5EF4-FFF2-40B4-BE49-F238E27FC236}">
-                <a16:creationId xmlns:a16="http://schemas.microsoft.com/office/drawing/2014/main" id="{A0325A36-1F1F-E780-FBB4-3639F6E61CBD}"/>
-              </a:ext>
-            </a:extLst>
-          </p:cNvPr>
-          <p:cNvPicPr>
-            <a:picLocks noChangeAspect="1"/>
-          </p:cNvPicPr>
-          <p:nvPr/>
-        </p:nvPicPr>
-        <p:blipFill>
-          <a:blip r:embed="rId10"/>
-          <a:stretch>
-            <a:fillRect/>
-          </a:stretch>
-        </p:blipFill>
-        <p:spPr>
-          <a:xfrm>
-            <a:off x="9378677" y="171815"/>
-            <a:ext cx="2621507" cy="2613887"/>
-          </a:xfrm>
-          <a:prstGeom prst="rect">
-            <a:avLst/>
-          </a:prstGeom>
-        </p:spPr>
-      </p:pic>
       <mc:AlternateContent xmlns:mc="http://schemas.openxmlformats.org/markup-compatibility/2006">
         <mc:Choice xmlns:a14="http://schemas.microsoft.com/office/drawing/2010/main" Requires="a14">
           <p:sp>
@@ -20468,6 +19567,34 @@
                     </m:d>
                   </m:oMath>
                 </a14:m>
+                <a:r>
+                  <a:rPr lang="en-US" altLang="zh-CN" dirty="0">
+                    <a:latin typeface="微软雅黑" panose="020B0503020204020204" pitchFamily="34" charset="-122"/>
+                    <a:ea typeface="微软雅黑" panose="020B0503020204020204" pitchFamily="34" charset="-122"/>
+                  </a:rPr>
+                  <a:t> </a:t>
+                </a:r>
+                <a:r>
+                  <a:rPr lang="zh-CN" altLang="en-US" dirty="0">
+                    <a:latin typeface="微软雅黑" panose="020B0503020204020204" pitchFamily="34" charset="-122"/>
+                    <a:ea typeface="微软雅黑" panose="020B0503020204020204" pitchFamily="34" charset="-122"/>
+                  </a:rPr>
+                  <a:t>→ 共</a:t>
+                </a:r>
+                <a:r>
+                  <a:rPr lang="en-US" altLang="zh-CN" dirty="0">
+                    <a:latin typeface="微软雅黑" panose="020B0503020204020204" pitchFamily="34" charset="-122"/>
+                    <a:ea typeface="微软雅黑" panose="020B0503020204020204" pitchFamily="34" charset="-122"/>
+                  </a:rPr>
+                  <a:t>40*7=280</a:t>
+                </a:r>
+                <a:r>
+                  <a:rPr lang="zh-CN" altLang="en-US" dirty="0">
+                    <a:latin typeface="微软雅黑" panose="020B0503020204020204" pitchFamily="34" charset="-122"/>
+                    <a:ea typeface="微软雅黑" panose="020B0503020204020204" pitchFamily="34" charset="-122"/>
+                  </a:rPr>
+                  <a:t>个帧</a:t>
+                </a:r>
                 <a:endParaRPr lang="en-US" altLang="zh-CN" dirty="0">
                   <a:latin typeface="微软雅黑" panose="020B0503020204020204" pitchFamily="34" charset="-122"/>
                   <a:ea typeface="微软雅黑" panose="020B0503020204020204" pitchFamily="34" charset="-122"/>
@@ -20500,7 +19627,7 @@
                 <a:avLst/>
               </a:prstGeom>
               <a:blipFill>
-                <a:blip r:embed="rId11"/>
+                <a:blip r:embed="rId10"/>
                 <a:stretch>
                   <a:fillRect l="-312" t="-8197" b="-24590"/>
                 </a:stretch>
@@ -20521,6 +19648,109 @@
           </p:sp>
         </mc:Fallback>
       </mc:AlternateContent>
+      <p:pic>
+        <p:nvPicPr>
+          <p:cNvPr id="15" name="图片 14">
+            <a:extLst>
+              <a:ext uri="{FF2B5EF4-FFF2-40B4-BE49-F238E27FC236}">
+                <a16:creationId xmlns:a16="http://schemas.microsoft.com/office/drawing/2014/main" id="{D263AFBE-422C-CA58-B152-26084CAA1654}"/>
+              </a:ext>
+            </a:extLst>
+          </p:cNvPr>
+          <p:cNvPicPr>
+            <a:picLocks noChangeAspect="1"/>
+          </p:cNvPicPr>
+          <p:nvPr/>
+        </p:nvPicPr>
+        <p:blipFill>
+          <a:blip r:embed="rId11">
+            <a:extLst>
+              <a:ext uri="{28A0092B-C50C-407E-A947-70E740481C1C}">
+                <a14:useLocalDpi xmlns:a14="http://schemas.microsoft.com/office/drawing/2010/main" val="0"/>
+              </a:ext>
+            </a:extLst>
+          </a:blip>
+          <a:srcRect l="33636" r="32723"/>
+          <a:stretch>
+            <a:fillRect/>
+          </a:stretch>
+        </p:blipFill>
+        <p:spPr>
+          <a:xfrm>
+            <a:off x="9565916" y="3909468"/>
+            <a:ext cx="2598873" cy="2561365"/>
+          </a:xfrm>
+          <a:prstGeom prst="rect">
+            <a:avLst/>
+          </a:prstGeom>
+        </p:spPr>
+      </p:pic>
+      <p:pic>
+        <p:nvPicPr>
+          <p:cNvPr id="20" name="图片 19">
+            <a:extLst>
+              <a:ext uri="{FF2B5EF4-FFF2-40B4-BE49-F238E27FC236}">
+                <a16:creationId xmlns:a16="http://schemas.microsoft.com/office/drawing/2014/main" id="{7EEEBC03-1A57-00C8-B187-EA40764CCC54}"/>
+              </a:ext>
+            </a:extLst>
+          </p:cNvPr>
+          <p:cNvPicPr>
+            <a:picLocks noChangeAspect="1"/>
+          </p:cNvPicPr>
+          <p:nvPr/>
+        </p:nvPicPr>
+        <p:blipFill>
+          <a:blip r:embed="rId12"/>
+          <a:stretch>
+            <a:fillRect/>
+          </a:stretch>
+        </p:blipFill>
+        <p:spPr>
+          <a:xfrm>
+            <a:off x="9542114" y="731916"/>
+            <a:ext cx="2495872" cy="2615500"/>
+          </a:xfrm>
+          <a:prstGeom prst="rect">
+            <a:avLst/>
+          </a:prstGeom>
+        </p:spPr>
+      </p:pic>
+      <p:pic>
+        <p:nvPicPr>
+          <p:cNvPr id="22" name="图片 21">
+            <a:extLst>
+              <a:ext uri="{FF2B5EF4-FFF2-40B4-BE49-F238E27FC236}">
+                <a16:creationId xmlns:a16="http://schemas.microsoft.com/office/drawing/2014/main" id="{314638B0-D715-36F3-F0C6-029A0EB7434C}"/>
+              </a:ext>
+            </a:extLst>
+          </p:cNvPr>
+          <p:cNvPicPr>
+            <a:picLocks noChangeAspect="1"/>
+          </p:cNvPicPr>
+          <p:nvPr/>
+        </p:nvPicPr>
+        <p:blipFill>
+          <a:blip r:embed="rId13">
+            <a:extLst>
+              <a:ext uri="{28A0092B-C50C-407E-A947-70E740481C1C}">
+                <a14:useLocalDpi xmlns:a14="http://schemas.microsoft.com/office/drawing/2010/main" val="0"/>
+              </a:ext>
+            </a:extLst>
+          </a:blip>
+          <a:stretch>
+            <a:fillRect/>
+          </a:stretch>
+        </p:blipFill>
+        <p:spPr>
+          <a:xfrm>
+            <a:off x="4672940" y="3961083"/>
+            <a:ext cx="4869174" cy="2328350"/>
+          </a:xfrm>
+          <a:prstGeom prst="rect">
+            <a:avLst/>
+          </a:prstGeom>
+        </p:spPr>
+      </p:pic>
     </p:spTree>
     <p:extLst>
       <p:ext uri="{BB962C8B-B14F-4D97-AF65-F5344CB8AC3E}">
